--- a/Presentation-Master.pptx
+++ b/Presentation-Master.pptx
@@ -216,7 +216,7 @@
           <a:p>
             <a:fld id="{BC660078-77E7-46A7-9649-B3FD62DAD7B9}" type="datetimeFigureOut">
               <a:rPr lang="tr-TR" smtClean="0"/>
-              <a:t>20.04.2026</a:t>
+              <a:t>22.04.2026</a:t>
             </a:fld>
             <a:endParaRPr lang="tr-TR"/>
           </a:p>
@@ -2944,7 +2944,7 @@
           <a:p>
             <a:fld id="{3EF59CCF-2F75-48E0-B827-F930E918C137}" type="datetimeFigureOut">
               <a:rPr lang="tr-TR" smtClean="0"/>
-              <a:t>20.04.2026</a:t>
+              <a:t>22.04.2026</a:t>
             </a:fld>
             <a:endParaRPr lang="tr-TR"/>
           </a:p>
@@ -3144,7 +3144,7 @@
           <a:p>
             <a:fld id="{3EF59CCF-2F75-48E0-B827-F930E918C137}" type="datetimeFigureOut">
               <a:rPr lang="tr-TR" smtClean="0"/>
-              <a:t>20.04.2026</a:t>
+              <a:t>22.04.2026</a:t>
             </a:fld>
             <a:endParaRPr lang="tr-TR"/>
           </a:p>
@@ -3354,7 +3354,7 @@
           <a:p>
             <a:fld id="{3EF59CCF-2F75-48E0-B827-F930E918C137}" type="datetimeFigureOut">
               <a:rPr lang="tr-TR" smtClean="0"/>
-              <a:t>20.04.2026</a:t>
+              <a:t>22.04.2026</a:t>
             </a:fld>
             <a:endParaRPr lang="tr-TR"/>
           </a:p>
@@ -3554,7 +3554,7 @@
           <a:p>
             <a:fld id="{3EF59CCF-2F75-48E0-B827-F930E918C137}" type="datetimeFigureOut">
               <a:rPr lang="tr-TR" smtClean="0"/>
-              <a:t>20.04.2026</a:t>
+              <a:t>22.04.2026</a:t>
             </a:fld>
             <a:endParaRPr lang="tr-TR"/>
           </a:p>
@@ -3830,7 +3830,7 @@
           <a:p>
             <a:fld id="{3EF59CCF-2F75-48E0-B827-F930E918C137}" type="datetimeFigureOut">
               <a:rPr lang="tr-TR" smtClean="0"/>
-              <a:t>20.04.2026</a:t>
+              <a:t>22.04.2026</a:t>
             </a:fld>
             <a:endParaRPr lang="tr-TR"/>
           </a:p>
@@ -4098,7 +4098,7 @@
           <a:p>
             <a:fld id="{3EF59CCF-2F75-48E0-B827-F930E918C137}" type="datetimeFigureOut">
               <a:rPr lang="tr-TR" smtClean="0"/>
-              <a:t>20.04.2026</a:t>
+              <a:t>22.04.2026</a:t>
             </a:fld>
             <a:endParaRPr lang="tr-TR"/>
           </a:p>
@@ -4513,7 +4513,7 @@
           <a:p>
             <a:fld id="{3EF59CCF-2F75-48E0-B827-F930E918C137}" type="datetimeFigureOut">
               <a:rPr lang="tr-TR" smtClean="0"/>
-              <a:t>20.04.2026</a:t>
+              <a:t>22.04.2026</a:t>
             </a:fld>
             <a:endParaRPr lang="tr-TR"/>
           </a:p>
@@ -4655,7 +4655,7 @@
           <a:p>
             <a:fld id="{3EF59CCF-2F75-48E0-B827-F930E918C137}" type="datetimeFigureOut">
               <a:rPr lang="tr-TR" smtClean="0"/>
-              <a:t>20.04.2026</a:t>
+              <a:t>22.04.2026</a:t>
             </a:fld>
             <a:endParaRPr lang="tr-TR"/>
           </a:p>
@@ -4768,7 +4768,7 @@
           <a:p>
             <a:fld id="{3EF59CCF-2F75-48E0-B827-F930E918C137}" type="datetimeFigureOut">
               <a:rPr lang="tr-TR" smtClean="0"/>
-              <a:t>20.04.2026</a:t>
+              <a:t>22.04.2026</a:t>
             </a:fld>
             <a:endParaRPr lang="tr-TR"/>
           </a:p>
@@ -5081,7 +5081,7 @@
           <a:p>
             <a:fld id="{3EF59CCF-2F75-48E0-B827-F930E918C137}" type="datetimeFigureOut">
               <a:rPr lang="tr-TR" smtClean="0"/>
-              <a:t>20.04.2026</a:t>
+              <a:t>22.04.2026</a:t>
             </a:fld>
             <a:endParaRPr lang="tr-TR"/>
           </a:p>
@@ -5370,7 +5370,7 @@
           <a:p>
             <a:fld id="{3EF59CCF-2F75-48E0-B827-F930E918C137}" type="datetimeFigureOut">
               <a:rPr lang="tr-TR" smtClean="0"/>
-              <a:t>20.04.2026</a:t>
+              <a:t>22.04.2026</a:t>
             </a:fld>
             <a:endParaRPr lang="tr-TR"/>
           </a:p>
@@ -5616,7 +5616,7 @@
           <a:p>
             <a:fld id="{3EF59CCF-2F75-48E0-B827-F930E918C137}" type="datetimeFigureOut">
               <a:rPr lang="tr-TR" smtClean="0"/>
-              <a:t>20.04.2026</a:t>
+              <a:t>22.04.2026</a:t>
             </a:fld>
             <a:endParaRPr lang="tr-TR"/>
           </a:p>
@@ -6387,7 +6387,7 @@
         <p:spPr>
           <a:xfrm>
             <a:off x="7374021" y="673100"/>
-            <a:ext cx="1143000" cy="1143000"/>
+            <a:ext cx="1062790" cy="982578"/>
           </a:xfrm>
           <a:prstGeom prst="ellipse">
             <a:avLst/>
@@ -6407,7 +6407,7 @@
           <a:p>
             <a:pPr algn="ctr"/>
             <a:r>
-              <a:rPr lang="en-US" sz="4400" b="1" dirty="0">
+              <a:rPr lang="en-US" sz="4000" b="1" dirty="0">
                 <a:solidFill>
                   <a:srgbClr val="FFFFFF"/>
                 </a:solidFill>
@@ -6425,7 +6425,7 @@
         </p:nvSpPr>
         <p:spPr>
           <a:xfrm>
-            <a:off x="8666077" y="701172"/>
+            <a:off x="8666747" y="628865"/>
             <a:ext cx="3195053" cy="645028"/>
           </a:xfrm>
           <a:prstGeom prst="rect">
@@ -6444,8 +6444,21 @@
                   <a:srgbClr val="0F172A"/>
                 </a:solidFill>
               </a:rPr>
-              <a:t>Alper Ebiçoğlu</a:t>
-            </a:r>
+              <a:t>Alper </a:t>
+            </a:r>
+            <a:r>
+              <a:rPr lang="en-US" sz="3600" b="1" dirty="0">
+                <a:solidFill>
+                  <a:srgbClr val="0F172A"/>
+                </a:solidFill>
+              </a:rPr>
+              <a:t>Ebiçoğlu</a:t>
+            </a:r>
+            <a:endParaRPr lang="en-US" sz="4000" b="1" dirty="0">
+              <a:solidFill>
+                <a:srgbClr val="0F172A"/>
+              </a:solidFill>
+            </a:endParaRPr>
           </a:p>
         </p:txBody>
       </p:sp>
@@ -6457,7 +6470,7 @@
         </p:nvSpPr>
         <p:spPr>
           <a:xfrm>
-            <a:off x="8666077" y="1384300"/>
+            <a:off x="8666747" y="1824122"/>
             <a:ext cx="3454400" cy="449178"/>
           </a:xfrm>
           <a:prstGeom prst="rect">
@@ -6471,7 +6484,7 @@
           <a:p>
             <a:pPr algn="l"/>
             <a:r>
-              <a:rPr lang="en-US" sz="2800" dirty="0">
+              <a:rPr lang="en-US" sz="2000" dirty="0">
                 <a:solidFill>
                   <a:srgbClr val="475569"/>
                 </a:solidFill>
@@ -6655,7 +6668,7 @@
         </p:nvSpPr>
         <p:spPr>
           <a:xfrm>
-            <a:off x="381000" y="4889500"/>
+            <a:off x="303275" y="5364479"/>
             <a:ext cx="4744453" cy="508000"/>
           </a:xfrm>
         </p:spPr>
@@ -6669,7 +6682,7 @@
               <a:buNone/>
             </a:pPr>
             <a:r>
-              <a:rPr lang="en-US" sz="3200" dirty="0">
+              <a:rPr lang="en-US" dirty="0">
                 <a:solidFill>
                   <a:srgbClr val="94A3B8"/>
                 </a:solidFill>
@@ -6679,280 +6692,259 @@
           </a:p>
         </p:txBody>
       </p:sp>
-      <p:grpSp>
-        <p:nvGrpSpPr>
-          <p:cNvPr id="14" name="Group 13">
+      <p:sp>
+        <p:nvSpPr>
+          <p:cNvPr id="10" name="Arrow: Right 9">
             <a:extLst>
               <a:ext uri="{FF2B5EF4-FFF2-40B4-BE49-F238E27FC236}">
-                <a16:creationId xmlns:a16="http://schemas.microsoft.com/office/drawing/2014/main" id="{3D1D0BC3-3BFF-8912-9DA1-DA0F0A31D2D7}"/>
+                <a16:creationId xmlns:a16="http://schemas.microsoft.com/office/drawing/2014/main" id="{F0C04564-E4C0-F5EF-41C0-C360D063978F}"/>
               </a:ext>
             </a:extLst>
           </p:cNvPr>
-          <p:cNvGrpSpPr/>
+          <p:cNvSpPr/>
           <p:nvPr/>
-        </p:nvGrpSpPr>
-        <p:grpSpPr>
-          <a:xfrm>
-            <a:off x="5067206" y="4889500"/>
-            <a:ext cx="1651187" cy="508000"/>
-            <a:chOff x="5067206" y="4889500"/>
-            <a:chExt cx="1651187" cy="508000"/>
-          </a:xfrm>
-        </p:grpSpPr>
-        <p:sp>
-          <p:nvSpPr>
-            <p:cNvPr id="10" name="Arrow: Right 9">
-              <a:extLst>
-                <a:ext uri="{FF2B5EF4-FFF2-40B4-BE49-F238E27FC236}">
-                  <a16:creationId xmlns:a16="http://schemas.microsoft.com/office/drawing/2014/main" id="{F0C04564-E4C0-F5EF-41C0-C360D063978F}"/>
-                </a:ext>
-              </a:extLst>
-            </p:cNvPr>
-            <p:cNvSpPr/>
-            <p:nvPr/>
-          </p:nvSpPr>
-          <p:spPr>
-            <a:xfrm>
-              <a:off x="5067206" y="4913564"/>
-              <a:ext cx="573024" cy="424180"/>
-            </a:xfrm>
-            <a:prstGeom prst="rightArrow">
-              <a:avLst/>
-            </a:prstGeom>
-            <a:ln>
-              <a:noFill/>
-            </a:ln>
-          </p:spPr>
-          <p:style>
-            <a:lnRef idx="2">
-              <a:schemeClr val="accent1">
-                <a:shade val="15000"/>
-              </a:schemeClr>
-            </a:lnRef>
-            <a:fillRef idx="1">
-              <a:schemeClr val="accent1"/>
-            </a:fillRef>
-            <a:effectRef idx="0">
-              <a:schemeClr val="accent1"/>
-            </a:effectRef>
-            <a:fontRef idx="minor">
-              <a:schemeClr val="lt1"/>
-            </a:fontRef>
-          </p:style>
-          <p:txBody>
-            <a:bodyPr rtlCol="0" anchor="ctr"/>
-            <a:lstStyle/>
-            <a:p>
-              <a:pPr algn="ctr"/>
-              <a:endParaRPr lang="tr-TR" dirty="0"/>
-            </a:p>
-          </p:txBody>
-        </p:sp>
-        <p:sp>
-          <p:nvSpPr>
-            <p:cNvPr id="12" name="Subtitle 2">
-              <a:extLst>
-                <a:ext uri="{FF2B5EF4-FFF2-40B4-BE49-F238E27FC236}">
-                  <a16:creationId xmlns:a16="http://schemas.microsoft.com/office/drawing/2014/main" id="{8346BC4F-555E-4279-9796-2E03531A4D9E}"/>
-                </a:ext>
-              </a:extLst>
-            </p:cNvPr>
-            <p:cNvSpPr txBox="1">
-              <a:spLocks/>
-            </p:cNvSpPr>
-            <p:nvPr/>
-          </p:nvSpPr>
-          <p:spPr>
-            <a:xfrm>
-              <a:off x="5741830" y="4889500"/>
-              <a:ext cx="976563" cy="508000"/>
-            </a:xfrm>
-            <a:prstGeom prst="rect">
-              <a:avLst/>
-            </a:prstGeom>
-          </p:spPr>
-          <p:txBody>
-            <a:bodyPr vert="horz" wrap="square" lIns="0" tIns="0" rIns="0" bIns="0" rtlCol="0" anchor="t">
-              <a:normAutofit/>
-            </a:bodyPr>
-            <a:lstStyle>
-              <a:lvl1pPr marL="0" indent="0" algn="ctr" defTabSz="914400" rtl="0" eaLnBrk="1" latinLnBrk="0" hangingPunct="1">
-                <a:lnSpc>
-                  <a:spcPct val="90000"/>
-                </a:lnSpc>
-                <a:spcBef>
-                  <a:spcPts val="1000"/>
-                </a:spcBef>
-                <a:buFont typeface="Arial" panose="020B0604020202020204" pitchFamily="34" charset="0"/>
-                <a:buNone/>
-                <a:defRPr sz="2400" kern="1200">
-                  <a:solidFill>
-                    <a:srgbClr val="334155"/>
-                  </a:solidFill>
-                  <a:latin typeface="+mn-lt"/>
-                  <a:ea typeface="+mn-ea"/>
-                  <a:cs typeface="+mn-cs"/>
-                </a:defRPr>
-              </a:lvl1pPr>
-              <a:lvl2pPr marL="457200" indent="0" algn="ctr" defTabSz="914400" rtl="0" eaLnBrk="1" latinLnBrk="0" hangingPunct="1">
-                <a:lnSpc>
-                  <a:spcPct val="90000"/>
-                </a:lnSpc>
-                <a:spcBef>
-                  <a:spcPts val="500"/>
-                </a:spcBef>
-                <a:buFont typeface="Arial" panose="020B0604020202020204" pitchFamily="34" charset="0"/>
-                <a:buNone/>
-                <a:defRPr sz="2000" kern="1200">
-                  <a:solidFill>
-                    <a:schemeClr val="tx1"/>
-                  </a:solidFill>
-                  <a:latin typeface="+mn-lt"/>
-                  <a:ea typeface="+mn-ea"/>
-                  <a:cs typeface="+mn-cs"/>
-                </a:defRPr>
-              </a:lvl2pPr>
-              <a:lvl3pPr marL="914400" indent="0" algn="ctr" defTabSz="914400" rtl="0" eaLnBrk="1" latinLnBrk="0" hangingPunct="1">
-                <a:lnSpc>
-                  <a:spcPct val="90000"/>
-                </a:lnSpc>
-                <a:spcBef>
-                  <a:spcPts val="500"/>
-                </a:spcBef>
-                <a:buFont typeface="Arial" panose="020B0604020202020204" pitchFamily="34" charset="0"/>
-                <a:buNone/>
-                <a:defRPr sz="1800" kern="1200">
-                  <a:solidFill>
-                    <a:schemeClr val="tx1"/>
-                  </a:solidFill>
-                  <a:latin typeface="+mn-lt"/>
-                  <a:ea typeface="+mn-ea"/>
-                  <a:cs typeface="+mn-cs"/>
-                </a:defRPr>
-              </a:lvl3pPr>
-              <a:lvl4pPr marL="1371600" indent="0" algn="ctr" defTabSz="914400" rtl="0" eaLnBrk="1" latinLnBrk="0" hangingPunct="1">
-                <a:lnSpc>
-                  <a:spcPct val="90000"/>
-                </a:lnSpc>
-                <a:spcBef>
-                  <a:spcPts val="500"/>
-                </a:spcBef>
-                <a:buFont typeface="Arial" panose="020B0604020202020204" pitchFamily="34" charset="0"/>
-                <a:buNone/>
-                <a:defRPr sz="1600" kern="1200">
-                  <a:solidFill>
-                    <a:schemeClr val="tx1"/>
-                  </a:solidFill>
-                  <a:latin typeface="+mn-lt"/>
-                  <a:ea typeface="+mn-ea"/>
-                  <a:cs typeface="+mn-cs"/>
-                </a:defRPr>
-              </a:lvl4pPr>
-              <a:lvl5pPr marL="1828800" indent="0" algn="ctr" defTabSz="914400" rtl="0" eaLnBrk="1" latinLnBrk="0" hangingPunct="1">
-                <a:lnSpc>
-                  <a:spcPct val="90000"/>
-                </a:lnSpc>
-                <a:spcBef>
-                  <a:spcPts val="500"/>
-                </a:spcBef>
-                <a:buFont typeface="Arial" panose="020B0604020202020204" pitchFamily="34" charset="0"/>
-                <a:buNone/>
-                <a:defRPr sz="1600" kern="1200">
-                  <a:solidFill>
-                    <a:schemeClr val="tx1"/>
-                  </a:solidFill>
-                  <a:latin typeface="+mn-lt"/>
-                  <a:ea typeface="+mn-ea"/>
-                  <a:cs typeface="+mn-cs"/>
-                </a:defRPr>
-              </a:lvl5pPr>
-              <a:lvl6pPr marL="2286000" indent="0" algn="ctr" defTabSz="914400" rtl="0" eaLnBrk="1" latinLnBrk="0" hangingPunct="1">
-                <a:lnSpc>
-                  <a:spcPct val="90000"/>
-                </a:lnSpc>
-                <a:spcBef>
-                  <a:spcPts val="500"/>
-                </a:spcBef>
-                <a:buFont typeface="Arial" panose="020B0604020202020204" pitchFamily="34" charset="0"/>
-                <a:buNone/>
-                <a:defRPr sz="1600" kern="1200">
-                  <a:solidFill>
-                    <a:schemeClr val="tx1"/>
-                  </a:solidFill>
-                  <a:latin typeface="+mn-lt"/>
-                  <a:ea typeface="+mn-ea"/>
-                  <a:cs typeface="+mn-cs"/>
-                </a:defRPr>
-              </a:lvl6pPr>
-              <a:lvl7pPr marL="2743200" indent="0" algn="ctr" defTabSz="914400" rtl="0" eaLnBrk="1" latinLnBrk="0" hangingPunct="1">
-                <a:lnSpc>
-                  <a:spcPct val="90000"/>
-                </a:lnSpc>
-                <a:spcBef>
-                  <a:spcPts val="500"/>
-                </a:spcBef>
-                <a:buFont typeface="Arial" panose="020B0604020202020204" pitchFamily="34" charset="0"/>
-                <a:buNone/>
-                <a:defRPr sz="1600" kern="1200">
-                  <a:solidFill>
-                    <a:schemeClr val="tx1"/>
-                  </a:solidFill>
-                  <a:latin typeface="+mn-lt"/>
-                  <a:ea typeface="+mn-ea"/>
-                  <a:cs typeface="+mn-cs"/>
-                </a:defRPr>
-              </a:lvl7pPr>
-              <a:lvl8pPr marL="3200400" indent="0" algn="ctr" defTabSz="914400" rtl="0" eaLnBrk="1" latinLnBrk="0" hangingPunct="1">
-                <a:lnSpc>
-                  <a:spcPct val="90000"/>
-                </a:lnSpc>
-                <a:spcBef>
-                  <a:spcPts val="500"/>
-                </a:spcBef>
-                <a:buFont typeface="Arial" panose="020B0604020202020204" pitchFamily="34" charset="0"/>
-                <a:buNone/>
-                <a:defRPr sz="1600" kern="1200">
-                  <a:solidFill>
-                    <a:schemeClr val="tx1"/>
-                  </a:solidFill>
-                  <a:latin typeface="+mn-lt"/>
-                  <a:ea typeface="+mn-ea"/>
-                  <a:cs typeface="+mn-cs"/>
-                </a:defRPr>
-              </a:lvl8pPr>
-              <a:lvl9pPr marL="3657600" indent="0" algn="ctr" defTabSz="914400" rtl="0" eaLnBrk="1" latinLnBrk="0" hangingPunct="1">
-                <a:lnSpc>
-                  <a:spcPct val="90000"/>
-                </a:lnSpc>
-                <a:spcBef>
-                  <a:spcPts val="500"/>
-                </a:spcBef>
-                <a:buFont typeface="Arial" panose="020B0604020202020204" pitchFamily="34" charset="0"/>
-                <a:buNone/>
-                <a:defRPr sz="1600" kern="1200">
-                  <a:solidFill>
-                    <a:schemeClr val="tx1"/>
-                  </a:solidFill>
-                  <a:latin typeface="+mn-lt"/>
-                  <a:ea typeface="+mn-ea"/>
-                  <a:cs typeface="+mn-cs"/>
-                </a:defRPr>
-              </a:lvl9pPr>
-            </a:lstStyle>
-            <a:p>
-              <a:pPr algn="l"/>
-              <a:r>
-                <a:rPr lang="en-US" sz="3200" dirty="0">
-                  <a:solidFill>
-                    <a:srgbClr val="94A3B8"/>
-                  </a:solidFill>
-                </a:rPr>
-                <a:t>SQL</a:t>
-              </a:r>
-            </a:p>
-          </p:txBody>
-        </p:sp>
-      </p:grpSp>
+        </p:nvSpPr>
+        <p:spPr>
+          <a:xfrm>
+            <a:off x="4476133" y="5347904"/>
+            <a:ext cx="516440" cy="424180"/>
+          </a:xfrm>
+          <a:prstGeom prst="rightArrow">
+            <a:avLst/>
+          </a:prstGeom>
+          <a:ln>
+            <a:noFill/>
+          </a:ln>
+        </p:spPr>
+        <p:style>
+          <a:lnRef idx="2">
+            <a:schemeClr val="accent1">
+              <a:shade val="15000"/>
+            </a:schemeClr>
+          </a:lnRef>
+          <a:fillRef idx="1">
+            <a:schemeClr val="accent1"/>
+          </a:fillRef>
+          <a:effectRef idx="0">
+            <a:schemeClr val="accent1"/>
+          </a:effectRef>
+          <a:fontRef idx="minor">
+            <a:schemeClr val="lt1"/>
+          </a:fontRef>
+        </p:style>
+        <p:txBody>
+          <a:bodyPr rtlCol="0" anchor="ctr"/>
+          <a:lstStyle/>
+          <a:p>
+            <a:pPr algn="ctr"/>
+            <a:endParaRPr lang="tr-TR" dirty="0"/>
+          </a:p>
+        </p:txBody>
+      </p:sp>
+      <p:sp>
+        <p:nvSpPr>
+          <p:cNvPr id="12" name="Subtitle 2">
+            <a:extLst>
+              <a:ext uri="{FF2B5EF4-FFF2-40B4-BE49-F238E27FC236}">
+                <a16:creationId xmlns:a16="http://schemas.microsoft.com/office/drawing/2014/main" id="{8346BC4F-555E-4279-9796-2E03531A4D9E}"/>
+              </a:ext>
+            </a:extLst>
+          </p:cNvPr>
+          <p:cNvSpPr txBox="1">
+            <a:spLocks/>
+          </p:cNvSpPr>
+          <p:nvPr/>
+        </p:nvSpPr>
+        <p:spPr>
+          <a:xfrm>
+            <a:off x="5127228" y="5364479"/>
+            <a:ext cx="1180447" cy="508000"/>
+          </a:xfrm>
+          <a:prstGeom prst="rect">
+            <a:avLst/>
+          </a:prstGeom>
+        </p:spPr>
+        <p:txBody>
+          <a:bodyPr vert="horz" wrap="square" lIns="0" tIns="0" rIns="0" bIns="0" rtlCol="0" anchor="t">
+            <a:normAutofit/>
+          </a:bodyPr>
+          <a:lstStyle>
+            <a:lvl1pPr marL="0" indent="0" algn="ctr" defTabSz="914400" rtl="0" eaLnBrk="1" latinLnBrk="0" hangingPunct="1">
+              <a:lnSpc>
+                <a:spcPct val="90000"/>
+              </a:lnSpc>
+              <a:spcBef>
+                <a:spcPts val="1000"/>
+              </a:spcBef>
+              <a:buFont typeface="Arial" panose="020B0604020202020204" pitchFamily="34" charset="0"/>
+              <a:buNone/>
+              <a:defRPr sz="2400" kern="1200">
+                <a:solidFill>
+                  <a:srgbClr val="334155"/>
+                </a:solidFill>
+                <a:latin typeface="+mn-lt"/>
+                <a:ea typeface="+mn-ea"/>
+                <a:cs typeface="+mn-cs"/>
+              </a:defRPr>
+            </a:lvl1pPr>
+            <a:lvl2pPr marL="457200" indent="0" algn="ctr" defTabSz="914400" rtl="0" eaLnBrk="1" latinLnBrk="0" hangingPunct="1">
+              <a:lnSpc>
+                <a:spcPct val="90000"/>
+              </a:lnSpc>
+              <a:spcBef>
+                <a:spcPts val="500"/>
+              </a:spcBef>
+              <a:buFont typeface="Arial" panose="020B0604020202020204" pitchFamily="34" charset="0"/>
+              <a:buNone/>
+              <a:defRPr sz="2000" kern="1200">
+                <a:solidFill>
+                  <a:schemeClr val="tx1"/>
+                </a:solidFill>
+                <a:latin typeface="+mn-lt"/>
+                <a:ea typeface="+mn-ea"/>
+                <a:cs typeface="+mn-cs"/>
+              </a:defRPr>
+            </a:lvl2pPr>
+            <a:lvl3pPr marL="914400" indent="0" algn="ctr" defTabSz="914400" rtl="0" eaLnBrk="1" latinLnBrk="0" hangingPunct="1">
+              <a:lnSpc>
+                <a:spcPct val="90000"/>
+              </a:lnSpc>
+              <a:spcBef>
+                <a:spcPts val="500"/>
+              </a:spcBef>
+              <a:buFont typeface="Arial" panose="020B0604020202020204" pitchFamily="34" charset="0"/>
+              <a:buNone/>
+              <a:defRPr sz="1800" kern="1200">
+                <a:solidFill>
+                  <a:schemeClr val="tx1"/>
+                </a:solidFill>
+                <a:latin typeface="+mn-lt"/>
+                <a:ea typeface="+mn-ea"/>
+                <a:cs typeface="+mn-cs"/>
+              </a:defRPr>
+            </a:lvl3pPr>
+            <a:lvl4pPr marL="1371600" indent="0" algn="ctr" defTabSz="914400" rtl="0" eaLnBrk="1" latinLnBrk="0" hangingPunct="1">
+              <a:lnSpc>
+                <a:spcPct val="90000"/>
+              </a:lnSpc>
+              <a:spcBef>
+                <a:spcPts val="500"/>
+              </a:spcBef>
+              <a:buFont typeface="Arial" panose="020B0604020202020204" pitchFamily="34" charset="0"/>
+              <a:buNone/>
+              <a:defRPr sz="1600" kern="1200">
+                <a:solidFill>
+                  <a:schemeClr val="tx1"/>
+                </a:solidFill>
+                <a:latin typeface="+mn-lt"/>
+                <a:ea typeface="+mn-ea"/>
+                <a:cs typeface="+mn-cs"/>
+              </a:defRPr>
+            </a:lvl4pPr>
+            <a:lvl5pPr marL="1828800" indent="0" algn="ctr" defTabSz="914400" rtl="0" eaLnBrk="1" latinLnBrk="0" hangingPunct="1">
+              <a:lnSpc>
+                <a:spcPct val="90000"/>
+              </a:lnSpc>
+              <a:spcBef>
+                <a:spcPts val="500"/>
+              </a:spcBef>
+              <a:buFont typeface="Arial" panose="020B0604020202020204" pitchFamily="34" charset="0"/>
+              <a:buNone/>
+              <a:defRPr sz="1600" kern="1200">
+                <a:solidFill>
+                  <a:schemeClr val="tx1"/>
+                </a:solidFill>
+                <a:latin typeface="+mn-lt"/>
+                <a:ea typeface="+mn-ea"/>
+                <a:cs typeface="+mn-cs"/>
+              </a:defRPr>
+            </a:lvl5pPr>
+            <a:lvl6pPr marL="2286000" indent="0" algn="ctr" defTabSz="914400" rtl="0" eaLnBrk="1" latinLnBrk="0" hangingPunct="1">
+              <a:lnSpc>
+                <a:spcPct val="90000"/>
+              </a:lnSpc>
+              <a:spcBef>
+                <a:spcPts val="500"/>
+              </a:spcBef>
+              <a:buFont typeface="Arial" panose="020B0604020202020204" pitchFamily="34" charset="0"/>
+              <a:buNone/>
+              <a:defRPr sz="1600" kern="1200">
+                <a:solidFill>
+                  <a:schemeClr val="tx1"/>
+                </a:solidFill>
+                <a:latin typeface="+mn-lt"/>
+                <a:ea typeface="+mn-ea"/>
+                <a:cs typeface="+mn-cs"/>
+              </a:defRPr>
+            </a:lvl6pPr>
+            <a:lvl7pPr marL="2743200" indent="0" algn="ctr" defTabSz="914400" rtl="0" eaLnBrk="1" latinLnBrk="0" hangingPunct="1">
+              <a:lnSpc>
+                <a:spcPct val="90000"/>
+              </a:lnSpc>
+              <a:spcBef>
+                <a:spcPts val="500"/>
+              </a:spcBef>
+              <a:buFont typeface="Arial" panose="020B0604020202020204" pitchFamily="34" charset="0"/>
+              <a:buNone/>
+              <a:defRPr sz="1600" kern="1200">
+                <a:solidFill>
+                  <a:schemeClr val="tx1"/>
+                </a:solidFill>
+                <a:latin typeface="+mn-lt"/>
+                <a:ea typeface="+mn-ea"/>
+                <a:cs typeface="+mn-cs"/>
+              </a:defRPr>
+            </a:lvl7pPr>
+            <a:lvl8pPr marL="3200400" indent="0" algn="ctr" defTabSz="914400" rtl="0" eaLnBrk="1" latinLnBrk="0" hangingPunct="1">
+              <a:lnSpc>
+                <a:spcPct val="90000"/>
+              </a:lnSpc>
+              <a:spcBef>
+                <a:spcPts val="500"/>
+              </a:spcBef>
+              <a:buFont typeface="Arial" panose="020B0604020202020204" pitchFamily="34" charset="0"/>
+              <a:buNone/>
+              <a:defRPr sz="1600" kern="1200">
+                <a:solidFill>
+                  <a:schemeClr val="tx1"/>
+                </a:solidFill>
+                <a:latin typeface="+mn-lt"/>
+                <a:ea typeface="+mn-ea"/>
+                <a:cs typeface="+mn-cs"/>
+              </a:defRPr>
+            </a:lvl8pPr>
+            <a:lvl9pPr marL="3657600" indent="0" algn="ctr" defTabSz="914400" rtl="0" eaLnBrk="1" latinLnBrk="0" hangingPunct="1">
+              <a:lnSpc>
+                <a:spcPct val="90000"/>
+              </a:lnSpc>
+              <a:spcBef>
+                <a:spcPts val="500"/>
+              </a:spcBef>
+              <a:buFont typeface="Arial" panose="020B0604020202020204" pitchFamily="34" charset="0"/>
+              <a:buNone/>
+              <a:defRPr sz="1600" kern="1200">
+                <a:solidFill>
+                  <a:schemeClr val="tx1"/>
+                </a:solidFill>
+                <a:latin typeface="+mn-lt"/>
+                <a:ea typeface="+mn-ea"/>
+                <a:cs typeface="+mn-cs"/>
+              </a:defRPr>
+            </a:lvl9pPr>
+          </a:lstStyle>
+          <a:p>
+            <a:pPr algn="l"/>
+            <a:r>
+              <a:rPr lang="en-US" sz="2800" dirty="0">
+                <a:solidFill>
+                  <a:srgbClr val="94A3B8"/>
+                </a:solidFill>
+              </a:rPr>
+              <a:t>Report</a:t>
+            </a:r>
+          </a:p>
+        </p:txBody>
+      </p:sp>
     </p:spTree>
     <p:extLst>
       <p:ext uri="{BB962C8B-B14F-4D97-AF65-F5344CB8AC3E}">
@@ -7427,7 +7419,7 @@
         </p:nvSpPr>
         <p:spPr>
           <a:xfrm>
-            <a:off x="1016000" y="1407886"/>
+            <a:off x="1016000" y="719117"/>
             <a:ext cx="10160000" cy="3193143"/>
           </a:xfrm>
           <a:prstGeom prst="rect">
@@ -7494,7 +7486,7 @@
         </p:nvSpPr>
         <p:spPr>
           <a:xfrm>
-            <a:off x="1016000" y="5029200"/>
+            <a:off x="1016000" y="5759533"/>
             <a:ext cx="10160000" cy="508000"/>
           </a:xfrm>
           <a:prstGeom prst="rect">
@@ -8969,7 +8961,7 @@
         </p:nvSpPr>
         <p:spPr>
           <a:xfrm>
-            <a:off x="1016000" y="5207000"/>
+            <a:off x="1016000" y="5080000"/>
             <a:ext cx="10160000" cy="508000"/>
           </a:xfrm>
           <a:prstGeom prst="rect">
@@ -9158,8 +9150,8 @@
         </p:nvSpPr>
         <p:spPr>
           <a:xfrm>
-            <a:off x="3365500" y="1778000"/>
-            <a:ext cx="2540000" cy="2159000"/>
+            <a:off x="3365499" y="1778000"/>
+            <a:ext cx="2540001" cy="2159000"/>
           </a:xfrm>
           <a:prstGeom prst="roundRect">
             <a:avLst>
@@ -9181,7 +9173,7 @@
           <a:p>
             <a:pPr algn="l"/>
             <a:r>
-              <a:rPr lang="en-US" sz="4800" b="1" dirty="0">
+              <a:rPr lang="en-US" sz="4400" b="1" dirty="0">
                 <a:solidFill>
                   <a:srgbClr val="22D3EE"/>
                 </a:solidFill>
@@ -9216,7 +9208,7 @@
                   <a:srgbClr val="64748B"/>
                 </a:solidFill>
               </a:rPr>
-              <a:t>Real-time NL → SQL</a:t>
+              <a:t>Real-time to SQL</a:t>
             </a:r>
           </a:p>
         </p:txBody>
@@ -9287,7 +9279,7 @@
                   <a:srgbClr val="64748B"/>
                 </a:solidFill>
               </a:rPr>
-              <a:t>Auto-visualize result</a:t>
+              <a:t>Visualize results</a:t>
             </a:r>
           </a:p>
         </p:txBody>
@@ -9301,7 +9293,7 @@
         <p:spPr>
           <a:xfrm>
             <a:off x="8826500" y="1778000"/>
-            <a:ext cx="2540000" cy="2159000"/>
+            <a:ext cx="2730500" cy="2159000"/>
           </a:xfrm>
           <a:prstGeom prst="roundRect">
             <a:avLst>
@@ -9880,7 +9872,7 @@
                   <a:srgbClr val="475569"/>
                 </a:solidFill>
               </a:rPr>
-              <a:t>Switching to browser  &gt;  </a:t>
+              <a:t>&gt;  </a:t>
             </a:r>
             <a:r>
               <a:rPr lang="en-US" sz="2400" dirty="0" err="1">
@@ -10101,7 +10093,7 @@
           <a:p>
             <a:pPr algn="l"/>
             <a:r>
-              <a:rPr lang="en-US" sz="2000" b="1" spc="300" dirty="0">
+              <a:rPr lang="en-US" b="1" spc="300" dirty="0">
                 <a:solidFill>
                   <a:srgbClr val="22D3EE"/>
                 </a:solidFill>
@@ -10116,7 +10108,7 @@
               </a:spcBef>
             </a:pPr>
             <a:r>
-              <a:rPr lang="en-US" sz="4800" b="1" dirty="0">
+              <a:rPr lang="en-US" sz="4400" b="1" dirty="0">
                 <a:solidFill>
                   <a:srgbClr val="22D3EE"/>
                 </a:solidFill>
@@ -10131,7 +10123,7 @@
               </a:spcBef>
             </a:pPr>
             <a:r>
-              <a:rPr lang="en-US" sz="2800" dirty="0">
+              <a:rPr lang="en-US" sz="2400" dirty="0">
                 <a:solidFill>
                   <a:srgbClr val="475569"/>
                 </a:solidFill>
@@ -10172,7 +10164,7 @@
           <a:p>
             <a:pPr algn="l"/>
             <a:r>
-              <a:rPr lang="en-US" sz="2000" b="1" spc="300" dirty="0">
+              <a:rPr lang="en-US" b="1" spc="300" dirty="0">
                 <a:solidFill>
                   <a:srgbClr val="6366F1"/>
                 </a:solidFill>
@@ -10187,7 +10179,7 @@
               </a:spcBef>
             </a:pPr>
             <a:r>
-              <a:rPr lang="en-US" sz="4800" b="1" dirty="0">
+              <a:rPr lang="en-US" sz="4400" b="1" dirty="0">
                 <a:solidFill>
                   <a:srgbClr val="6366F1"/>
                 </a:solidFill>
@@ -10202,7 +10194,7 @@
               </a:spcBef>
             </a:pPr>
             <a:r>
-              <a:rPr lang="en-US" sz="2800" dirty="0">
+              <a:rPr lang="en-US" sz="2400" dirty="0">
                 <a:solidFill>
                   <a:srgbClr val="475569"/>
                 </a:solidFill>
@@ -10243,7 +10235,7 @@
           <a:p>
             <a:pPr algn="l"/>
             <a:r>
-              <a:rPr lang="en-US" sz="2000" b="1" spc="300" dirty="0">
+              <a:rPr lang="en-US" b="1" spc="300" dirty="0">
                 <a:solidFill>
                   <a:srgbClr val="F43F5E"/>
                 </a:solidFill>
@@ -10258,7 +10250,7 @@
               </a:spcBef>
             </a:pPr>
             <a:r>
-              <a:rPr lang="en-US" sz="4800" b="1" dirty="0">
+              <a:rPr lang="en-US" sz="4400" b="1" dirty="0">
                 <a:solidFill>
                   <a:srgbClr val="F43F5E"/>
                 </a:solidFill>
@@ -10273,7 +10265,7 @@
               </a:spcBef>
             </a:pPr>
             <a:r>
-              <a:rPr lang="en-US" sz="2800" dirty="0">
+              <a:rPr lang="en-US" sz="2400" dirty="0">
                 <a:solidFill>
                   <a:srgbClr val="475569"/>
                 </a:solidFill>
@@ -10925,7 +10917,7 @@
           <a:p>
             <a:pPr algn="l"/>
             <a:r>
-              <a:rPr lang="en-US" sz="2400" b="1" spc="300" dirty="0">
+              <a:rPr lang="en-US" sz="2000" b="1" spc="300" dirty="0">
                 <a:solidFill>
                   <a:srgbClr val="9F1239"/>
                 </a:solidFill>
@@ -10940,7 +10932,7 @@
               </a:spcBef>
             </a:pPr>
             <a:r>
-              <a:rPr lang="en-US" sz="3600" b="1" dirty="0">
+              <a:rPr lang="en-US" sz="3200" b="1" dirty="0">
                 <a:solidFill>
                   <a:srgbClr val="0F172A"/>
                 </a:solidFill>
@@ -10948,13 +10940,13 @@
               <a:t>It gets hard fast.</a:t>
             </a:r>
             <a:br>
-              <a:rPr lang="en-US" sz="3600" b="1" dirty="0">
+              <a:rPr lang="en-US" sz="3200" b="1" dirty="0">
                 <a:solidFill>
                   <a:srgbClr val="0F172A"/>
                 </a:solidFill>
               </a:rPr>
             </a:br>
-            <a:endParaRPr lang="en-US" sz="3600" b="1" dirty="0">
+            <a:endParaRPr lang="en-US" sz="3200" b="1" dirty="0">
               <a:solidFill>
                 <a:srgbClr val="0F172A"/>
               </a:solidFill>
@@ -10969,7 +10961,7 @@
               <a:buChar char="•"/>
             </a:pPr>
             <a:r>
-              <a:rPr lang="en-US" sz="2400" b="1" dirty="0">
+              <a:rPr lang="en-US" sz="2000" b="1" dirty="0">
                 <a:solidFill>
                   <a:srgbClr val="0F172A"/>
                 </a:solidFill>
@@ -10977,7 +10969,7 @@
               <a:t>Prompt drift </a:t>
             </a:r>
             <a:r>
-              <a:rPr lang="en-US" sz="2000" dirty="0">
+              <a:rPr lang="en-US" dirty="0">
                 <a:solidFill>
                   <a:srgbClr val="64748B"/>
                 </a:solidFill>
@@ -10994,7 +10986,7 @@
               <a:buChar char="•"/>
             </a:pPr>
             <a:r>
-              <a:rPr lang="en-US" sz="2400" b="1" dirty="0">
+              <a:rPr lang="en-US" sz="2000" b="1" dirty="0">
                 <a:solidFill>
                   <a:srgbClr val="0F172A"/>
                 </a:solidFill>
@@ -11002,7 +10994,7 @@
               <a:t>Ambiguous questions </a:t>
             </a:r>
             <a:r>
-              <a:rPr lang="en-US" sz="2000" dirty="0">
+              <a:rPr lang="en-US" dirty="0">
                 <a:solidFill>
                   <a:srgbClr val="64748B"/>
                 </a:solidFill>
@@ -11019,7 +11011,7 @@
               <a:buChar char="•"/>
             </a:pPr>
             <a:r>
-              <a:rPr lang="en-US" sz="2400" b="1" dirty="0">
+              <a:rPr lang="en-US" sz="2000" b="1" dirty="0">
                 <a:solidFill>
                   <a:srgbClr val="0F172A"/>
                 </a:solidFill>
@@ -11027,7 +11019,7 @@
               <a:t>Cost &amp; latency </a:t>
             </a:r>
             <a:r>
-              <a:rPr lang="en-US" sz="2000" dirty="0">
+              <a:rPr lang="en-US" dirty="0">
                 <a:solidFill>
                   <a:srgbClr val="64748B"/>
                 </a:solidFill>
@@ -11044,7 +11036,7 @@
               <a:buChar char="•"/>
             </a:pPr>
             <a:r>
-              <a:rPr lang="en-US" sz="2400" b="1" dirty="0">
+              <a:rPr lang="en-US" sz="2000" b="1" dirty="0">
                 <a:solidFill>
                   <a:srgbClr val="0F172A"/>
                 </a:solidFill>
@@ -11052,7 +11044,7 @@
               <a:t>Hallucinated columns </a:t>
             </a:r>
             <a:r>
-              <a:rPr lang="en-US" sz="2000" dirty="0">
+              <a:rPr lang="en-US" dirty="0">
                 <a:solidFill>
                   <a:srgbClr val="64748B"/>
                 </a:solidFill>
@@ -11069,7 +11061,7 @@
               <a:buChar char="•"/>
             </a:pPr>
             <a:r>
-              <a:rPr lang="en-US" sz="2400" b="1" dirty="0">
+              <a:rPr lang="en-US" sz="2000" b="1" dirty="0">
                 <a:solidFill>
                   <a:srgbClr val="0F172A"/>
                 </a:solidFill>
@@ -11077,7 +11069,7 @@
               <a:t>Permissions </a:t>
             </a:r>
             <a:r>
-              <a:rPr lang="en-US" sz="2000" dirty="0">
+              <a:rPr lang="en-US" dirty="0">
                 <a:solidFill>
                   <a:srgbClr val="64748B"/>
                 </a:solidFill>
@@ -11120,7 +11112,7 @@
           <a:p>
             <a:pPr algn="l"/>
             <a:r>
-              <a:rPr lang="en-US" sz="2400" b="1" spc="300" dirty="0">
+              <a:rPr lang="en-US" sz="2000" b="1" spc="300" dirty="0">
                 <a:solidFill>
                   <a:srgbClr val="047857"/>
                 </a:solidFill>
@@ -11135,7 +11127,7 @@
               </a:spcBef>
             </a:pPr>
             <a:r>
-              <a:rPr lang="en-US" sz="3600" b="1" dirty="0">
+              <a:rPr lang="en-US" sz="3200" b="1" dirty="0">
                 <a:solidFill>
                   <a:srgbClr val="0F172A"/>
                 </a:solidFill>
@@ -11143,13 +11135,13 @@
               <a:t>What actually works.</a:t>
             </a:r>
             <a:br>
-              <a:rPr lang="en-US" sz="3600" b="1" dirty="0">
+              <a:rPr lang="en-US" sz="3200" b="1" dirty="0">
                 <a:solidFill>
                   <a:srgbClr val="0F172A"/>
                 </a:solidFill>
               </a:rPr>
             </a:br>
-            <a:endParaRPr lang="en-US" sz="3600" b="1" dirty="0">
+            <a:endParaRPr lang="en-US" sz="3200" b="1" dirty="0">
               <a:solidFill>
                 <a:srgbClr val="0F172A"/>
               </a:solidFill>
@@ -11164,7 +11156,7 @@
               <a:buChar char="✓"/>
             </a:pPr>
             <a:r>
-              <a:rPr lang="en-US" sz="2400" b="1" dirty="0">
+              <a:rPr lang="en-US" sz="2000" b="1" dirty="0">
                 <a:solidFill>
                   <a:srgbClr val="0F172A"/>
                 </a:solidFill>
@@ -11172,7 +11164,7 @@
               <a:t>Always validate </a:t>
             </a:r>
             <a:r>
-              <a:rPr lang="en-US" sz="2000" dirty="0">
+              <a:rPr lang="en-US" dirty="0">
                 <a:solidFill>
                   <a:srgbClr val="475569"/>
                 </a:solidFill>
@@ -11189,7 +11181,7 @@
               <a:buChar char="✓"/>
             </a:pPr>
             <a:r>
-              <a:rPr lang="en-US" sz="2400" b="1" dirty="0">
+              <a:rPr lang="en-US" sz="2000" b="1" dirty="0">
                 <a:solidFill>
                   <a:srgbClr val="0F172A"/>
                 </a:solidFill>
@@ -11197,7 +11189,7 @@
               <a:t>Keep prompts strict </a:t>
             </a:r>
             <a:r>
-              <a:rPr lang="en-US" sz="2000" dirty="0">
+              <a:rPr lang="en-US" dirty="0">
                 <a:solidFill>
                   <a:srgbClr val="475569"/>
                 </a:solidFill>
@@ -11214,7 +11206,7 @@
               <a:buChar char="✓"/>
             </a:pPr>
             <a:r>
-              <a:rPr lang="en-US" sz="2400" b="1" dirty="0">
+              <a:rPr lang="en-US" sz="2000" b="1" dirty="0">
                 <a:solidFill>
                   <a:srgbClr val="0F172A"/>
                 </a:solidFill>
@@ -11222,7 +11214,7 @@
               <a:t>Read-only DB user </a:t>
             </a:r>
             <a:r>
-              <a:rPr lang="en-US" sz="2000" dirty="0">
+              <a:rPr lang="en-US" dirty="0">
                 <a:solidFill>
                   <a:srgbClr val="475569"/>
                 </a:solidFill>
@@ -11239,7 +11231,7 @@
               <a:buChar char="✓"/>
             </a:pPr>
             <a:r>
-              <a:rPr lang="en-US" sz="2400" b="1" dirty="0">
+              <a:rPr lang="en-US" sz="2000" b="1" dirty="0">
                 <a:solidFill>
                   <a:srgbClr val="0F172A"/>
                 </a:solidFill>
@@ -11247,7 +11239,7 @@
               <a:t>Log everything </a:t>
             </a:r>
             <a:r>
-              <a:rPr lang="en-US" sz="2000" dirty="0">
+              <a:rPr lang="en-US" dirty="0">
                 <a:solidFill>
                   <a:srgbClr val="475569"/>
                 </a:solidFill>
@@ -11264,7 +11256,7 @@
               <a:buChar char="✓"/>
             </a:pPr>
             <a:r>
-              <a:rPr lang="en-US" sz="2400" b="1" dirty="0">
+              <a:rPr lang="en-US" sz="2000" b="1" dirty="0">
                 <a:solidFill>
                   <a:srgbClr val="0F172A"/>
                 </a:solidFill>
@@ -11272,7 +11264,7 @@
               <a:t>Start small </a:t>
             </a:r>
             <a:r>
-              <a:rPr lang="en-US" sz="2000" dirty="0">
+              <a:rPr lang="en-US" dirty="0">
                 <a:solidFill>
                   <a:srgbClr val="475569"/>
                 </a:solidFill>
@@ -12308,7 +12300,7 @@
               </a:lnSpc>
             </a:pPr>
             <a:r>
-              <a:rPr lang="en-US" sz="7200" b="1" dirty="0">
+              <a:rPr lang="en-US" sz="6000" b="1" dirty="0">
                 <a:solidFill>
                   <a:srgbClr val="FFFFFF"/>
                 </a:solidFill>
@@ -12323,7 +12315,7 @@
               </a:lnSpc>
             </a:pPr>
             <a:r>
-              <a:rPr lang="en-US" sz="7200" b="1" dirty="0">
+              <a:rPr lang="en-US" sz="6000" b="1" dirty="0">
                 <a:solidFill>
                   <a:srgbClr val="FFFFFF"/>
                 </a:solidFill>
@@ -12331,7 +12323,7 @@
               <a:t>Then evolve into a </a:t>
             </a:r>
             <a:r>
-              <a:rPr lang="en-US" sz="7200" b="1" i="1" dirty="0">
+              <a:rPr lang="en-US" sz="6000" b="1" i="1" dirty="0">
                 <a:solidFill>
                   <a:srgbClr val="22D3EE"/>
                 </a:solidFill>
@@ -12355,7 +12347,7 @@
         </p:nvGrpSpPr>
         <p:grpSpPr>
           <a:xfrm>
-            <a:off x="862642" y="2936063"/>
+            <a:off x="743378" y="2838101"/>
             <a:ext cx="10124672" cy="1524000"/>
             <a:chOff x="762000" y="3624943"/>
             <a:chExt cx="6634951" cy="1524000"/>
@@ -12394,14 +12386,14 @@
                 </a:spcBef>
               </a:pPr>
               <a:r>
-                <a:rPr lang="en-US" sz="2800" dirty="0">
+                <a:rPr lang="en-US" sz="2700" dirty="0">
                   <a:solidFill>
                     <a:srgbClr val="FFFFFF"/>
                   </a:solidFill>
                 </a:rPr>
                 <a:t>We learnt programming languages to talk with computers</a:t>
               </a:r>
-              <a:endParaRPr lang="en-US" sz="2000" dirty="0">
+              <a:endParaRPr lang="en-US" sz="2700" dirty="0">
                 <a:solidFill>
                   <a:srgbClr val="94A3B8"/>
                 </a:solidFill>
@@ -12513,8 +12505,8 @@
         </p:nvSpPr>
         <p:spPr>
           <a:xfrm>
-            <a:off x="5272789" y="5442636"/>
-            <a:ext cx="2695850" cy="954107"/>
+            <a:off x="5153525" y="5504190"/>
+            <a:ext cx="2695850" cy="830997"/>
           </a:xfrm>
           <a:prstGeom prst="rect">
             <a:avLst/>
@@ -12529,7 +12521,7 @@
           <a:p>
             <a:pPr algn="r"/>
             <a:r>
-              <a:rPr lang="en-US" sz="2800" i="1" dirty="0">
+              <a:rPr lang="en-US" sz="2400" i="1" dirty="0">
                 <a:solidFill>
                   <a:srgbClr val="94A3B8"/>
                 </a:solidFill>
@@ -12537,21 +12529,21 @@
               <a:t>Presentation</a:t>
             </a:r>
             <a:br>
-              <a:rPr lang="en-US" sz="2800" i="1" dirty="0">
+              <a:rPr lang="en-US" sz="2400" i="1" dirty="0">
                 <a:solidFill>
                   <a:srgbClr val="94A3B8"/>
                 </a:solidFill>
               </a:rPr>
             </a:br>
             <a:r>
-              <a:rPr lang="en-US" sz="2800" i="1" dirty="0">
+              <a:rPr lang="en-US" sz="2400" i="1" dirty="0">
                 <a:solidFill>
                   <a:srgbClr val="94A3B8"/>
                 </a:solidFill>
               </a:rPr>
-              <a:t>+ Source-code</a:t>
-            </a:r>
-            <a:endParaRPr lang="tr-TR" sz="2800" i="1" dirty="0"/>
+              <a:t>Source-code</a:t>
+            </a:r>
+            <a:endParaRPr lang="tr-TR" sz="2400" i="1" dirty="0"/>
           </a:p>
         </p:txBody>
       </p:sp>
@@ -12610,8 +12602,8 @@
         </p:nvSpPr>
         <p:spPr>
           <a:xfrm>
-            <a:off x="862642" y="5243713"/>
-            <a:ext cx="3386413" cy="1153029"/>
+            <a:off x="778693" y="5243714"/>
+            <a:ext cx="4094385" cy="1153029"/>
           </a:xfrm>
           <a:prstGeom prst="rect">
             <a:avLst/>
@@ -12666,8 +12658,8 @@
         </p:nvSpPr>
         <p:spPr>
           <a:xfrm>
-            <a:off x="2825886" y="482478"/>
-            <a:ext cx="2979828" cy="1170440"/>
+            <a:off x="2897136" y="449382"/>
+            <a:ext cx="2826769" cy="999408"/>
           </a:xfrm>
           <a:prstGeom prst="roundRect">
             <a:avLst/>
@@ -13241,7 +13233,7 @@
         <p:spPr>
           <a:xfrm>
             <a:off x="503990" y="1143000"/>
-            <a:ext cx="1524000" cy="1524000"/>
+            <a:ext cx="885423" cy="1291442"/>
           </a:xfrm>
           <a:prstGeom prst="rect">
             <a:avLst/>
@@ -13478,8 +13470,8 @@
         </p:nvSpPr>
         <p:spPr>
           <a:xfrm>
-            <a:off x="6416842" y="3429000"/>
-            <a:ext cx="1524000" cy="1524000"/>
+            <a:off x="9183793" y="3429000"/>
+            <a:ext cx="945859" cy="1214252"/>
           </a:xfrm>
           <a:prstGeom prst="rect">
             <a:avLst/>
@@ -14380,7 +14372,7 @@
           <a:p>
             <a:pPr algn="l"/>
             <a:r>
-              <a:rPr lang="en-US" sz="1400" b="1" spc="300" dirty="0">
+              <a:rPr lang="en-US" sz="1200" b="1" spc="300" dirty="0">
                 <a:solidFill>
                   <a:srgbClr val="0891B2"/>
                 </a:solidFill>
@@ -14395,7 +14387,7 @@
               </a:spcBef>
             </a:pPr>
             <a:r>
-              <a:rPr lang="en-US" sz="2800" b="1" dirty="0">
+              <a:rPr lang="en-US" sz="2400" b="1" dirty="0">
                 <a:solidFill>
                   <a:srgbClr val="0F172A"/>
                 </a:solidFill>
@@ -14410,7 +14402,7 @@
               </a:spcBef>
             </a:pPr>
             <a:r>
-              <a:rPr lang="en-US" sz="1400" dirty="0">
+              <a:rPr lang="en-US" sz="1200" dirty="0">
                 <a:solidFill>
                   <a:srgbClr val="64748B"/>
                 </a:solidFill>
@@ -14490,7 +14482,7 @@
           <a:p>
             <a:pPr algn="l"/>
             <a:r>
-              <a:rPr lang="en-US" sz="1400" b="1" spc="300" dirty="0">
+              <a:rPr lang="en-US" sz="1200" b="1" spc="300" dirty="0">
                 <a:solidFill>
                   <a:srgbClr val="0891B2"/>
                 </a:solidFill>
@@ -14505,7 +14497,7 @@
               </a:spcBef>
             </a:pPr>
             <a:r>
-              <a:rPr lang="en-US" sz="2800" b="1" dirty="0">
+              <a:rPr lang="en-US" sz="2400" b="1" dirty="0">
                 <a:solidFill>
                   <a:srgbClr val="0F172A"/>
                 </a:solidFill>
@@ -14520,7 +14512,7 @@
               </a:spcBef>
             </a:pPr>
             <a:r>
-              <a:rPr lang="en-US" sz="1400" dirty="0">
+              <a:rPr lang="en-US" sz="1200" dirty="0">
                 <a:solidFill>
                   <a:srgbClr val="64748B"/>
                 </a:solidFill>
@@ -14600,7 +14592,7 @@
           <a:p>
             <a:pPr algn="l"/>
             <a:r>
-              <a:rPr lang="en-US" sz="1400" b="1" spc="300" dirty="0">
+              <a:rPr lang="en-US" sz="1200" b="1" spc="300" dirty="0">
                 <a:solidFill>
                   <a:srgbClr val="22D3EE"/>
                 </a:solidFill>
@@ -14615,7 +14607,7 @@
               </a:spcBef>
             </a:pPr>
             <a:r>
-              <a:rPr lang="en-US" sz="2800" b="1" dirty="0">
+              <a:rPr lang="en-US" sz="2400" b="1" dirty="0">
                 <a:solidFill>
                   <a:srgbClr val="0F172A"/>
                 </a:solidFill>
@@ -14630,7 +14622,7 @@
               </a:spcBef>
             </a:pPr>
             <a:r>
-              <a:rPr lang="en-US" sz="1400" dirty="0">
+              <a:rPr lang="en-US" sz="1200" dirty="0">
                 <a:solidFill>
                   <a:srgbClr val="64748B"/>
                 </a:solidFill>
@@ -14710,7 +14702,7 @@
           <a:p>
             <a:pPr algn="l"/>
             <a:r>
-              <a:rPr lang="en-US" sz="1400" b="1" spc="300" dirty="0">
+              <a:rPr lang="en-US" sz="1200" b="1" spc="300" dirty="0">
                 <a:solidFill>
                   <a:srgbClr val="10B981"/>
                 </a:solidFill>
@@ -14725,7 +14717,7 @@
               </a:spcBef>
             </a:pPr>
             <a:r>
-              <a:rPr lang="en-US" sz="2800" b="1" dirty="0">
+              <a:rPr lang="en-US" sz="2400" b="1" dirty="0">
                 <a:solidFill>
                   <a:srgbClr val="0F172A"/>
                 </a:solidFill>
@@ -14740,7 +14732,7 @@
               </a:spcBef>
             </a:pPr>
             <a:r>
-              <a:rPr lang="en-US" sz="1400" dirty="0">
+              <a:rPr lang="en-US" sz="1200" dirty="0">
                 <a:solidFill>
                   <a:srgbClr val="64748B"/>
                 </a:solidFill>
@@ -14803,7 +14795,9 @@
           </a:solidFill>
           <a:ln w="19050">
             <a:solidFill>
-              <a:srgbClr val="F43F5E"/>
+              <a:schemeClr val="accent3">
+                <a:lumMod val="75000"/>
+              </a:schemeClr>
             </a:solidFill>
           </a:ln>
           <a:effectLst>
@@ -14820,9 +14814,9 @@
           <a:p>
             <a:pPr algn="l"/>
             <a:r>
-              <a:rPr lang="en-US" sz="1400" b="1" spc="300" dirty="0">
-                <a:solidFill>
-                  <a:srgbClr val="F43F5E"/>
+              <a:rPr lang="en-US" sz="1200" b="1" spc="300" dirty="0">
+                <a:solidFill>
+                  <a:srgbClr val="7B4F05"/>
                 </a:solidFill>
               </a:rPr>
               <a:t>05</a:t>
@@ -14835,7 +14829,7 @@
               </a:spcBef>
             </a:pPr>
             <a:r>
-              <a:rPr lang="en-US" sz="2800" b="1" dirty="0">
+              <a:rPr lang="en-US" sz="2400" b="1" dirty="0">
                 <a:solidFill>
                   <a:srgbClr val="0F172A"/>
                 </a:solidFill>
@@ -14850,7 +14844,7 @@
               </a:spcBef>
             </a:pPr>
             <a:r>
-              <a:rPr lang="en-US" sz="1400" dirty="0">
+              <a:rPr lang="en-US" sz="1200" dirty="0">
                 <a:solidFill>
                   <a:srgbClr val="64748B"/>
                 </a:solidFill>
@@ -14930,7 +14924,7 @@
           <a:p>
             <a:pPr algn="l"/>
             <a:r>
-              <a:rPr lang="en-US" sz="1400" b="1" spc="300" dirty="0">
+              <a:rPr lang="en-US" sz="1200" b="1" spc="300" dirty="0">
                 <a:solidFill>
                   <a:srgbClr val="F59E0B"/>
                 </a:solidFill>
@@ -14945,7 +14939,7 @@
               </a:spcBef>
             </a:pPr>
             <a:r>
-              <a:rPr lang="en-US" sz="2800" b="1" dirty="0">
+              <a:rPr lang="en-US" sz="2400" b="1" dirty="0">
                 <a:solidFill>
                   <a:srgbClr val="0F172A"/>
                 </a:solidFill>
@@ -14960,7 +14954,7 @@
               </a:spcBef>
             </a:pPr>
             <a:r>
-              <a:rPr lang="en-US" sz="1400" dirty="0">
+              <a:rPr lang="en-US" sz="1200" dirty="0">
                 <a:solidFill>
                   <a:srgbClr val="64748B"/>
                 </a:solidFill>
@@ -15080,11 +15074,10 @@
           <a:bodyPr wrap="square" lIns="90000" tIns="90000" rIns="90000" bIns="90000" anchor="t"/>
           <a:lstStyle/>
           <a:p>
-            <a:pPr algn="l"/>
             <a:r>
               <a:rPr lang="en-US" sz="1400" b="1" spc="300" dirty="0">
                 <a:solidFill>
-                  <a:srgbClr val="22D3EE"/>
+                  <a:srgbClr val="FF0000"/>
                 </a:solidFill>
               </a:rPr>
               <a:t>07</a:t>
@@ -15097,13 +15090,18 @@
               </a:rPr>
             </a:br>
             <a:r>
-              <a:rPr lang="en-US" sz="2800" b="1" dirty="0">
+              <a:rPr lang="en-US" sz="2400" b="1" dirty="0">
                 <a:solidFill>
                   <a:schemeClr val="accent5"/>
                 </a:solidFill>
               </a:rPr>
               <a:t>On Error</a:t>
             </a:r>
+            <a:endParaRPr lang="en-US" sz="2800" b="1" dirty="0">
+              <a:solidFill>
+                <a:schemeClr val="accent5"/>
+              </a:solidFill>
+            </a:endParaRPr>
           </a:p>
           <a:p>
             <a:pPr algn="l">
@@ -15659,7 +15657,7 @@
         </p:spPr>
         <p:txBody>
           <a:bodyPr>
-            <a:normAutofit/>
+            <a:normAutofit fontScale="90000"/>
           </a:bodyPr>
           <a:lstStyle/>
           <a:p>
@@ -15934,7 +15932,7 @@
               <a:t>⏸</a:t>
             </a:r>
             <a:r>
-              <a:rPr lang="en-US" sz="3200" b="1" dirty="0">
+              <a:rPr lang="en-US" sz="2800" b="1" dirty="0">
                 <a:solidFill>
                   <a:srgbClr val="0F172A"/>
                 </a:solidFill>
@@ -15942,14 +15940,14 @@
               <a:t>Would you </a:t>
             </a:r>
             <a:br>
-              <a:rPr lang="en-US" sz="3200" b="1" dirty="0">
+              <a:rPr lang="en-US" sz="2800" b="1" dirty="0">
                 <a:solidFill>
                   <a:srgbClr val="0F172A"/>
                 </a:solidFill>
               </a:rPr>
             </a:br>
             <a:r>
-              <a:rPr lang="en-US" sz="3200" b="1" dirty="0">
+              <a:rPr lang="en-US" sz="2800" b="1" dirty="0">
                 <a:solidFill>
                   <a:srgbClr val="0F172A"/>
                 </a:solidFill>
@@ -15957,20 +15955,25 @@
               <a:t>     run this </a:t>
             </a:r>
             <a:br>
-              <a:rPr lang="en-US" sz="3200" b="1" dirty="0">
+              <a:rPr lang="en-US" sz="2800" b="1" dirty="0">
                 <a:solidFill>
                   <a:srgbClr val="0F172A"/>
                 </a:solidFill>
               </a:rPr>
             </a:br>
             <a:r>
-              <a:rPr lang="en-US" sz="3200" b="1" dirty="0">
+              <a:rPr lang="en-US" sz="2800" b="1" dirty="0">
                 <a:solidFill>
                   <a:srgbClr val="0F172A"/>
                 </a:solidFill>
               </a:rPr>
-              <a:t>     in production?"</a:t>
-            </a:r>
+              <a:t>     in production?</a:t>
+            </a:r>
+            <a:endParaRPr lang="en-US" sz="3200" b="1" dirty="0">
+              <a:solidFill>
+                <a:srgbClr val="0F172A"/>
+              </a:solidFill>
+            </a:endParaRPr>
           </a:p>
           <a:p>
             <a:pPr algn="l">
@@ -16112,6 +16115,46 @@
           </p:spPr>
         </p:pic>
       </p:grpSp>
+      <p:sp>
+        <p:nvSpPr>
+          <p:cNvPr id="4" name="TextBox 3">
+            <a:extLst>
+              <a:ext uri="{FF2B5EF4-FFF2-40B4-BE49-F238E27FC236}">
+                <a16:creationId xmlns:a16="http://schemas.microsoft.com/office/drawing/2014/main" id="{198970D3-6DAB-B756-8ED7-860209BBE762}"/>
+              </a:ext>
+            </a:extLst>
+          </p:cNvPr>
+          <p:cNvSpPr txBox="1"/>
+          <p:nvPr/>
+        </p:nvSpPr>
+        <p:spPr>
+          <a:xfrm>
+            <a:off x="11076710" y="3590941"/>
+            <a:ext cx="442356" cy="584775"/>
+          </a:xfrm>
+          <a:prstGeom prst="rect">
+            <a:avLst/>
+          </a:prstGeom>
+          <a:noFill/>
+        </p:spPr>
+        <p:txBody>
+          <a:bodyPr wrap="square">
+            <a:spAutoFit/>
+          </a:bodyPr>
+          <a:lstStyle/>
+          <a:p>
+            <a:r>
+              <a:rPr lang="en-US" sz="3200" b="1" spc="300" dirty="0">
+                <a:solidFill>
+                  <a:srgbClr val="92400E"/>
+                </a:solidFill>
+              </a:rPr>
+              <a:t>⏸</a:t>
+            </a:r>
+            <a:endParaRPr lang="en-US" sz="3200" dirty="0"/>
+          </a:p>
+        </p:txBody>
+      </p:sp>
     </p:spTree>
     <p:extLst>
       <p:ext uri="{BB962C8B-B14F-4D97-AF65-F5344CB8AC3E}">
